--- a/meetings/september/28/presentation/progress-deck.pptx
+++ b/meetings/september/28/presentation/progress-deck.pptx
@@ -4398,7 +4398,7 @@
                 </a:solidFill>
                 <a:latin typeface="Calibri"/>
               </a:rPr>
-              <a:t>•  And the direction of the sampling rate effect reverses. Sampling faster stops hurting. Our headline finding was an artifact of how we took a derivative, not a property of flocking.</a:t>
+              <a:t>•  And the sampling rate effect changes shape. Tolerable noise now peaks at a middle sampling rate and falls sharply on either side of it. Our old headline was an artifact of how we took a derivative, but faster is not simply better.</a:t>
             </a:r>
           </a:p>
           <a:p>

--- a/meetings/september/28/presentation/progress-deck.pptx
+++ b/meetings/september/28/presentation/progress-deck.pptx
@@ -4398,7 +4398,7 @@
                 </a:solidFill>
                 <a:latin typeface="Calibri"/>
               </a:rPr>
-              <a:t>•  And the sampling rate effect changes shape. Tolerable noise now peaks at a middle sampling rate and falls sharply on either side of it. Our old headline was an artifact of how we took a derivative, but faster is not simply better.</a:t>
+              <a:t>•  And the sampling rate effect goes away. Once the smoothing window is set in seconds rather than in frames, sampling faster neither helps nor hurts across a fourfold range. What matters is how long a stretch of motion the method looks at, and our old headline was an artifact of how we took a derivative.</a:t>
             </a:r>
           </a:p>
           <a:p>
